--- a/dist/초1/수학/수와연산/초1_수학_수와연산_09_10이되는더하기_학생용.pptx
+++ b/dist/초1/수학/수와연산/초1_수학_수와연산_09_10이되는더하기_학생용.pptx
@@ -119,13 +119,13 @@
   <p:extLst>
     <p:ext uri="{521415D9-36F7-43E2-AB2F-B90AF26B5E84}">
       <p14:sectionLst xmlns:p14="http://schemas.microsoft.com/office/powerpoint/2010/main">
-        <p14:section name="도입" id="{cf627df2-76c2-7cd8-9c76-dfe1707ef9c2}">
+        <p14:section name="도입" id="{44046621-2ce7-3c78-0884-0c7d29c727c8}">
           <p14:sldIdLst>
             <p14:sldId id="256"/>
             <p14:sldId id="257"/>
           </p14:sldIdLst>
         </p14:section>
-        <p14:section name="개념" id="{c91e80fb-e1b5-32fd-995c-6965cdda5580}">
+        <p14:section name="개념" id="{489ee595-c103-4d93-1c77-9e74c4322183}">
           <p14:sldIdLst>
             <p14:sldId id="258"/>
             <p14:sldId id="259"/>
@@ -133,31 +133,31 @@
             <p14:sldId id="262"/>
           </p14:sldIdLst>
         </p14:section>
-        <p14:section name="연습" id="{8f071424-6b67-8d9d-d1fa-0630107bc347}">
+        <p14:section name="연습" id="{7feac09c-c3fe-5feb-89e8-cc9cf1c1093f}">
           <p14:sldIdLst>
             <p14:sldId id="260"/>
             <p14:sldId id="263"/>
             <p14:sldId id="264"/>
           </p14:sldIdLst>
         </p14:section>
-        <p14:section name="개념" id="{157de05a-4d15-1099-eae8-88e4d8670400}">
+        <p14:section name="개념" id="{3b9b009b-e2bf-a3a0-2c81-a2732bafc78a}">
           <p14:sldIdLst/>
         </p14:section>
-        <p14:section name="연습" id="{de05ec68-4455-578d-548e-a48b0462e77b}">
+        <p14:section name="연습" id="{510ec0f3-8986-1e1c-4dd0-34a7ce32c5f8}">
           <p14:sldIdLst/>
         </p14:section>
-        <p14:section name="확인" id="{0d476161-4ace-db55-7f6f-a09b0ade0631}">
+        <p14:section name="확인" id="{a19d8d6f-3bbf-6735-e7e0-a55be7e6b71a}">
           <p14:sldIdLst>
             <p14:sldId id="265"/>
             <p14:sldId id="266"/>
           </p14:sldIdLst>
         </p14:section>
-        <p14:section name="정리" id="{1040b61e-a279-d565-f6fd-844d27d5b5cd}">
+        <p14:section name="정리" id="{95783c12-49a1-cb0a-4c00-81ff8d10ceda}">
           <p14:sldIdLst>
             <p14:sldId id="267"/>
           </p14:sldIdLst>
         </p14:section>
-        <p14:section name="보충" id="{29b21496-c67b-895e-4edd-e8150c595184}">
+        <p14:section name="보충" id="{7f1c529a-01ea-7b59-59b4-58c31901a62e}">
           <p14:sldIdLst>
             <p14:sldId id="268"/>
           </p14:sldIdLst>

--- a/dist/초1/수학/수와연산/초1_수학_수와연산_09_10이되는더하기_학생용.pptx
+++ b/dist/초1/수학/수와연산/초1_수학_수와연산_09_10이되는더하기_학생용.pptx
@@ -119,13 +119,13 @@
   <p:extLst>
     <p:ext uri="{521415D9-36F7-43E2-AB2F-B90AF26B5E84}">
       <p14:sectionLst xmlns:p14="http://schemas.microsoft.com/office/powerpoint/2010/main">
-        <p14:section name="도입" id="{44046621-2ce7-3c78-0884-0c7d29c727c8}">
+        <p14:section name="도입" id="{b99c20f7-f3ac-1259-93d8-f09f6e5edfa3}">
           <p14:sldIdLst>
             <p14:sldId id="256"/>
             <p14:sldId id="257"/>
           </p14:sldIdLst>
         </p14:section>
-        <p14:section name="개념" id="{489ee595-c103-4d93-1c77-9e74c4322183}">
+        <p14:section name="개념" id="{37d10282-29f2-2765-9a28-7f099f8c6bce}">
           <p14:sldIdLst>
             <p14:sldId id="258"/>
             <p14:sldId id="259"/>
@@ -133,31 +133,31 @@
             <p14:sldId id="262"/>
           </p14:sldIdLst>
         </p14:section>
-        <p14:section name="연습" id="{7feac09c-c3fe-5feb-89e8-cc9cf1c1093f}">
+        <p14:section name="연습" id="{ae2530d9-1d47-008b-ec61-b4aee32e89cb}">
           <p14:sldIdLst>
             <p14:sldId id="260"/>
             <p14:sldId id="263"/>
             <p14:sldId id="264"/>
           </p14:sldIdLst>
         </p14:section>
-        <p14:section name="개념" id="{3b9b009b-e2bf-a3a0-2c81-a2732bafc78a}">
+        <p14:section name="개념" id="{849b8d7d-8416-5209-a563-bd6cdf476a69}">
           <p14:sldIdLst/>
         </p14:section>
-        <p14:section name="연습" id="{510ec0f3-8986-1e1c-4dd0-34a7ce32c5f8}">
+        <p14:section name="연습" id="{cd4eab11-49d4-5b6f-1a7e-e80b6543642d}">
           <p14:sldIdLst/>
         </p14:section>
-        <p14:section name="확인" id="{a19d8d6f-3bbf-6735-e7e0-a55be7e6b71a}">
+        <p14:section name="확인" id="{eff6d420-871b-1a6a-3a7c-db4027e8ec9a}">
           <p14:sldIdLst>
             <p14:sldId id="265"/>
             <p14:sldId id="266"/>
           </p14:sldIdLst>
         </p14:section>
-        <p14:section name="정리" id="{95783c12-49a1-cb0a-4c00-81ff8d10ceda}">
+        <p14:section name="정리" id="{e31a2d7e-1488-83bb-4fc4-1678eb3ce8f6}">
           <p14:sldIdLst>
             <p14:sldId id="267"/>
           </p14:sldIdLst>
         </p14:section>
-        <p14:section name="보충" id="{7f1c529a-01ea-7b59-59b4-58c31901a62e}">
+        <p14:section name="보충" id="{e7e3cef3-306f-a2b5-0d70-3abbeb34bcfa}">
           <p14:sldIdLst>
             <p14:sldId id="268"/>
           </p14:sldIdLst>
@@ -5688,7 +5688,7 @@
         </p:nvSpPr>
         <p:spPr>
           <a:xfrm>
-            <a:off x="548640" y="5157216"/>
+            <a:off x="548640" y="5180076"/>
             <a:ext cx="566928" cy="566928"/>
           </a:xfrm>
           <a:prstGeom prst="roundRect">
@@ -5735,8 +5735,8 @@
         </p:nvSpPr>
         <p:spPr>
           <a:xfrm flipH="1" flipV="1">
-            <a:off x="2593848" y="5318760"/>
-            <a:ext cx="853440" cy="243840"/>
+            <a:off x="3207258" y="5337810"/>
+            <a:ext cx="880110" cy="251460"/>
           </a:xfrm>
           <a:prstGeom prst="line">
             <a:avLst/>
@@ -5758,8 +5758,8 @@
         </p:nvSpPr>
         <p:spPr>
           <a:xfrm flipV="1">
-            <a:off x="3447288" y="5318760"/>
-            <a:ext cx="853440" cy="243840"/>
+            <a:off x="4087368" y="5337810"/>
+            <a:ext cx="880110" cy="251460"/>
           </a:xfrm>
           <a:prstGeom prst="line">
             <a:avLst/>
@@ -5781,8 +5781,8 @@
         </p:nvSpPr>
         <p:spPr>
           <a:xfrm>
-            <a:off x="3142488" y="5562600"/>
-            <a:ext cx="609600" cy="609600"/>
+            <a:off x="3773043" y="5589270"/>
+            <a:ext cx="628650" cy="628650"/>
           </a:xfrm>
           <a:prstGeom prst="ellipse">
             <a:avLst/>
@@ -5804,7 +5804,7 @@
             <a:pPr eaLnBrk="0" algn="ctr" indent="0" marL="0">
               <a:buNone/>
             </a:pPr>
-            <a:endParaRPr lang="ko-KR" sz="2400" dirty="0"/>
+            <a:endParaRPr lang="ko-KR" sz="2500" dirty="0"/>
           </a:p>
         </p:txBody>
       </p:sp>
@@ -5816,8 +5816,8 @@
         </p:nvSpPr>
         <p:spPr>
           <a:xfrm>
-            <a:off x="2289048" y="4709160"/>
-            <a:ext cx="609600" cy="609600"/>
+            <a:off x="2892933" y="4709160"/>
+            <a:ext cx="628650" cy="628650"/>
           </a:xfrm>
           <a:prstGeom prst="ellipse">
             <a:avLst/>
@@ -5840,7 +5840,7 @@
               <a:buNone/>
             </a:pPr>
             <a:r>
-              <a:rPr lang="ko-KR" altLang="en-US" sz="2400" b="1" dirty="0">
+              <a:rPr lang="ko-KR" altLang="en-US" sz="2500" b="1" dirty="0">
                 <a:solidFill>
                   <a:srgbClr val="1F2937"/>
                 </a:solidFill>
@@ -5850,7 +5850,7 @@
               </a:rPr>
               <a:t>10</a:t>
             </a:r>
-            <a:endParaRPr lang="ko-KR" sz="2400" dirty="0"/>
+            <a:endParaRPr lang="ko-KR" sz="2500" dirty="0"/>
           </a:p>
         </p:txBody>
       </p:sp>
@@ -5862,8 +5862,8 @@
         </p:nvSpPr>
         <p:spPr>
           <a:xfrm>
-            <a:off x="3995928" y="4709160"/>
-            <a:ext cx="609600" cy="609600"/>
+            <a:off x="4653153" y="4709160"/>
+            <a:ext cx="628650" cy="628650"/>
           </a:xfrm>
           <a:prstGeom prst="ellipse">
             <a:avLst/>
@@ -5886,7 +5886,7 @@
               <a:buNone/>
             </a:pPr>
             <a:r>
-              <a:rPr lang="ko-KR" altLang="en-US" sz="2400" b="1" dirty="0">
+              <a:rPr lang="ko-KR" altLang="en-US" sz="2500" b="1" dirty="0">
                 <a:solidFill>
                   <a:srgbClr val="1F2937"/>
                 </a:solidFill>
@@ -5896,7 +5896,7 @@
               </a:rPr>
               <a:t>6</a:t>
             </a:r>
-            <a:endParaRPr lang="ko-KR" sz="2400" dirty="0"/>
+            <a:endParaRPr lang="ko-KR" sz="2500" dirty="0"/>
           </a:p>
         </p:txBody>
       </p:sp>

--- a/dist/초1/수학/수와연산/초1_수학_수와연산_09_10이되는더하기_학생용.pptx
+++ b/dist/초1/수학/수와연산/초1_수학_수와연산_09_10이되는더하기_학생용.pptx
@@ -119,13 +119,13 @@
   <p:extLst>
     <p:ext uri="{521415D9-36F7-43E2-AB2F-B90AF26B5E84}">
       <p14:sectionLst xmlns:p14="http://schemas.microsoft.com/office/powerpoint/2010/main">
-        <p14:section name="도입" id="{b99c20f7-f3ac-1259-93d8-f09f6e5edfa3}">
+        <p14:section name="도입" id="{0046b065-66f5-32d1-d607-0d095a4b7e9c}">
           <p14:sldIdLst>
             <p14:sldId id="256"/>
             <p14:sldId id="257"/>
           </p14:sldIdLst>
         </p14:section>
-        <p14:section name="개념" id="{37d10282-29f2-2765-9a28-7f099f8c6bce}">
+        <p14:section name="개념" id="{0743037a-b223-f35f-3d56-bbd1eae06527}">
           <p14:sldIdLst>
             <p14:sldId id="258"/>
             <p14:sldId id="259"/>
@@ -133,31 +133,31 @@
             <p14:sldId id="262"/>
           </p14:sldIdLst>
         </p14:section>
-        <p14:section name="연습" id="{ae2530d9-1d47-008b-ec61-b4aee32e89cb}">
+        <p14:section name="연습" id="{1965b3af-dde4-43a0-2e6a-95fd623d5187}">
           <p14:sldIdLst>
             <p14:sldId id="260"/>
             <p14:sldId id="263"/>
             <p14:sldId id="264"/>
           </p14:sldIdLst>
         </p14:section>
-        <p14:section name="개념" id="{849b8d7d-8416-5209-a563-bd6cdf476a69}">
+        <p14:section name="개념" id="{f9f04428-be07-f2a8-05cd-4410fef68b2f}">
           <p14:sldIdLst/>
         </p14:section>
-        <p14:section name="연습" id="{cd4eab11-49d4-5b6f-1a7e-e80b6543642d}">
+        <p14:section name="연습" id="{0cafffae-0767-292e-7fef-81ee5628fac1}">
           <p14:sldIdLst/>
         </p14:section>
-        <p14:section name="확인" id="{eff6d420-871b-1a6a-3a7c-db4027e8ec9a}">
+        <p14:section name="확인" id="{43f2c7ad-a0ce-37fa-ff88-e5a5a5d7a9b2}">
           <p14:sldIdLst>
             <p14:sldId id="265"/>
             <p14:sldId id="266"/>
           </p14:sldIdLst>
         </p14:section>
-        <p14:section name="정리" id="{e31a2d7e-1488-83bb-4fc4-1678eb3ce8f6}">
+        <p14:section name="정리" id="{cee75c45-ee99-d712-452f-28110c9004aa}">
           <p14:sldIdLst>
             <p14:sldId id="267"/>
           </p14:sldIdLst>
         </p14:section>
-        <p14:section name="보충" id="{e7e3cef3-306f-a2b5-0d70-3abbeb34bcfa}">
+        <p14:section name="보충" id="{c7c0ff3b-3b7d-2646-2870-270c715b77f3}">
           <p14:sldIdLst>
             <p14:sldId id="268"/>
           </p14:sldIdLst>
@@ -6949,7 +6949,7 @@
           </p:nvPr>
         </p:nvGraphicFramePr>
         <p:xfrm>
-          <a:off x="836676" y="2915920"/>
+          <a:off x="836676" y="2936240"/>
           <a:ext cx="10515600" cy="914400"/>
         </p:xfrm>
         <a:graphic>
@@ -6968,7 +6968,7 @@
                 <a:gridCol w="946404"/>
                 <a:gridCol w="946404"/>
               </a:tblGrid>
-              <a:tr h="650240">
+              <a:tr h="629920">
                 <a:tc>
                   <a:txBody>
                     <a:bodyPr/>
@@ -7650,7 +7650,7 @@
                   </a:tcPr>
                 </a:tc>
               </a:tr>
-              <a:tr h="650240">
+              <a:tr h="629920">
                 <a:tc>
                   <a:txBody>
                     <a:bodyPr/>
